--- a/docs/deck/breakwater-pitch.pptx
+++ b/docs/deck/breakwater-pitch.pptx
@@ -12968,7 +12968,7 @@
                 <a:cs typeface="Instrument Sans"/>
                 <a:sym typeface="Instrument Sans"/>
               </a:rPr>
-              <a:t>State archival: after mainnet moved to Protocol 23, archived entries were restored with stale values (478 entries affected).</a:t>
+              <a:t>Protocol 23 archived 478 contract entries with stale values; 84 were restored into live state before Protocol 24 fixed it.</a:t>
             </a:r>
             <a:endParaRPr/>
           </a:p>
@@ -14745,7 +14745,7 @@
                 <a:cs typeface="Instrument Sans"/>
                 <a:sym typeface="Instrument Sans"/>
               </a:rPr>
-              <a:t>Next: rule-rotation probe, malicious keep-alive, restoration-cost CI gate.</a:t>
+              <a:t>Next: rule-rotation probe, restoration-cost CI gate, XDR replay export; then crates.io and a GitHub Action.</a:t>
             </a:r>
             <a:endParaRPr/>
           </a:p>
@@ -15418,7 +15418,7 @@
         <p:spPr>
           <a:xfrm>
             <a:off x="914400" y="4800600"/>
-            <a:ext cx="7863840" cy="2286000"/>
+            <a:ext cx="7863840" cy="2697480"/>
           </a:xfrm>
           <a:prstGeom prst="rect">
             <a:avLst/>
@@ -15458,7 +15458,7 @@
                 <a:cs typeface="Instrument Sans"/>
                 <a:sym typeface="Instrument Sans"/>
               </a:rPr>
-              <a:t>Daily cap set to 1 728 ledgers, not 17 280: 49 → 49 → 49 USDC (+1 / +10 / +1718 ledgers) is 147 in 24 h against a 100 cap; up to 10× per day.</a:t>
+              <a:t>Daily window 1 728 ledgers, not 17 280: 49 → 49 → 49 USDC (+1 / +10 / +1718) is 147 in 24 h vs a 100 cap; up to 10× a day.</a:t>
             </a:r>
             <a:endParaRPr/>
           </a:p>
@@ -15487,7 +15487,7 @@
                 <a:cs typeface="Instrument Sans"/>
                 <a:sym typeface="Instrument Sans"/>
               </a:rPr>
-              <a:t>Stream that never extends TTL: “stream 0 is archived with 275 days left to run”.</a:t>
+              <a:t>No extend_ttl: “stream 0 is archived with 275 days left to run”.</a:t>
             </a:r>
             <a:endParaRPr/>
           </a:p>
@@ -15516,7 +15516,36 @@
                 <a:cs typeface="Instrument Sans"/>
                 <a:sym typeface="Instrument Sans"/>
               </a:rPr>
-              <a:t>Unauthenticated bump_ttl keeps an entry alive 1.3 days past its stream; one call restores 5 entries against a budget of 3.</a:t>
+              <a:t>Unauthenticated bump_ttl keeps a stream alive 1.3 days past its end.</a:t>
+            </a:r>
+            <a:endParaRPr/>
+          </a:p>
+          <a:p>
+            <a:pPr indent="-411480" lvl="0" marL="411480" marR="0" rtl="0" algn="l">
+              <a:spcBef>
+                <a:spcPts val="0"/>
+              </a:spcBef>
+              <a:spcAft>
+                <a:spcPts val="0"/>
+              </a:spcAft>
+              <a:buClr>
+                <a:srgbClr val="0F0F0F"/>
+              </a:buClr>
+              <a:buSzPts val="2400"/>
+              <a:buFont typeface="Arial"/>
+              <a:buChar char="►"/>
+            </a:pPr>
+            <a:r>
+              <a:rPr b="0" i="0" lang="en-US" sz="2000" u="none" cap="none" strike="noStrike">
+                <a:solidFill>
+                  <a:srgbClr val="2A2A2A"/>
+                </a:solidFill>
+                <a:latin typeface="Instrument Sans"/>
+                <a:ea typeface="Instrument Sans"/>
+                <a:cs typeface="Instrument Sans"/>
+                <a:sym typeface="Instrument Sans"/>
+              </a:rPr>
+              <a:t>After 90 quiet days one withdraw_many restores 5 entries against a budget of 3.</a:t>
             </a:r>
             <a:endParaRPr/>
           </a:p>
@@ -15530,7 +15559,7 @@
         </p:nvSpPr>
         <p:spPr>
           <a:xfrm>
-            <a:off x="914400" y="7269480"/>
+            <a:off x="914400" y="7635240"/>
             <a:ext cx="7863840" cy="914400"/>
           </a:xfrm>
           <a:prstGeom prst="roundRect">
@@ -16467,37 +16496,8 @@
         </p:blipFill>
         <p:spPr>
           <a:xfrm>
-            <a:off x="9326880" y="4185984"/>
-            <a:ext cx="8046720" cy="2126633"/>
-          </a:xfrm>
-          <a:prstGeom prst="rect">
-            <a:avLst/>
-          </a:prstGeom>
-          <a:ln w="12700">
-            <a:solidFill>
-              <a:srgbClr val="DFDDD6"/>
-            </a:solidFill>
-          </a:ln>
-        </p:spPr>
-      </p:pic>
-      <p:pic xmlns:p="http://schemas.openxmlformats.org/presentationml/2006/main" xmlns:a="http://schemas.openxmlformats.org/drawingml/2006/main" xmlns:r="http://schemas.openxmlformats.org/officeDocument/2006/relationships">
-        <p:nvPicPr>
-          <p:cNvPr id="169" name="Screenshot S6-github-merged-prs.png" descr="S6-github-merged-prs.png"/>
-          <p:cNvPicPr>
-            <a:picLocks noChangeAspect="1"/>
-          </p:cNvPicPr>
-          <p:nvPr/>
-        </p:nvPicPr>
-        <p:blipFill>
-          <a:blip r:embed="rId202"/>
-          <a:stretch>
-            <a:fillRect/>
-          </a:stretch>
-        </p:blipFill>
-        <p:spPr>
-          <a:xfrm>
-            <a:off x="9326880" y="6495497"/>
-            <a:ext cx="8046720" cy="1708638"/>
+            <a:off x="10056730" y="3794760"/>
+            <a:ext cx="6587021" cy="4800600"/>
           </a:xfrm>
           <a:prstGeom prst="rect">
             <a:avLst/>

--- a/docs/deck/breakwater-pitch.pptx
+++ b/docs/deck/breakwater-pitch.pptx
@@ -11774,6 +11774,34 @@
           </a:p>
         </p:txBody>
       </p:sp>
+      <p:pic>
+        <p:nvPicPr>
+          <p:cNvPr descr="Breakwater logo: a wave breaking on a tetrapod" id="200" name="Breakwater logo"/>
+          <p:cNvPicPr>
+            <a:picLocks noChangeAspect="1"/>
+          </p:cNvPicPr>
+          <p:nvPr/>
+        </p:nvPicPr>
+        <p:blipFill>
+          <a:blip r:embed="rId6"/>
+          <a:stretch>
+            <a:fillRect/>
+          </a:stretch>
+        </p:blipFill>
+        <p:spPr>
+          <a:xfrm>
+            <a:off x="7143750" y="2628900"/>
+            <a:ext cx="4572000" cy="3124200"/>
+          </a:xfrm>
+          <a:prstGeom prst="rect">
+            <a:avLst/>
+          </a:prstGeom>
+          <a:noFill/>
+          <a:ln>
+            <a:noFill/>
+          </a:ln>
+        </p:spPr>
+      </p:pic>
     </p:spTree>
   </p:cSld>
   <p:clrMapOvr>
@@ -12328,7 +12356,7 @@
                 <a:cs typeface="Instrument Sans"/>
                 <a:sym typeface="Instrument Sans"/>
               </a:rPr>
-              <a:t>👉 Think: </a:t>
+              <a:t>Why sequences: </a:t>
             </a:r>
             <a:r>
               <a:rPr b="0" i="0" lang="en-US" sz="2000" u="none" cap="none" strike="noStrike">
@@ -13057,7 +13085,7 @@
                 <a:cs typeface="Instrument Sans"/>
                 <a:sym typeface="Instrument Sans"/>
               </a:rPr>
-              <a:t>👉 Think: </a:t>
+              <a:t>The gap: </a:t>
             </a:r>
             <a:r>
               <a:rPr b="0" i="0" lang="en-US" sz="2000" u="none" cap="none" strike="noStrike">
@@ -13786,7 +13814,7 @@
                 <a:cs typeface="Instrument Sans"/>
                 <a:sym typeface="Instrument Sans"/>
               </a:rPr>
-              <a:t>👉 Think: </a:t>
+              <a:t>Real auth: </a:t>
             </a:r>
             <a:r>
               <a:rPr b="0" i="0" lang="en-US" sz="2000" u="none" cap="none" strike="noStrike">
@@ -14805,7 +14833,7 @@
                 <a:cs typeface="Instrument Sans"/>
                 <a:sym typeface="Instrument Sans"/>
               </a:rPr>
-              <a:t>👉 Think: </a:t>
+              <a:t>Provenance: </a:t>
             </a:r>
             <a:r>
               <a:rPr b="0" i="0" lang="en-US" sz="2000" u="none" cap="none" strike="noStrike">
@@ -15605,7 +15633,7 @@
                 <a:cs typeface="Instrument Sans"/>
                 <a:sym typeface="Instrument Sans"/>
               </a:rPr>
-              <a:t>👉 Think: </a:t>
+              <a:t>Takeaway: </a:t>
             </a:r>
             <a:r>
               <a:rPr b="0" i="0" lang="en-US" sz="2000" u="none" cap="none" strike="noStrike">
@@ -16274,7 +16302,7 @@
                 <a:cs typeface="Instrument Sans"/>
                 <a:sym typeface="Instrument Sans"/>
               </a:rPr>
-              <a:t>Built during the event: 11 commits on main, 10 merged PRs, 40 tests, CI on every PR.</a:t>
+              <a:t>Built during the event: 19 commits on main, 18 merged PRs, 43 tests, CI on every PR.</a:t>
             </a:r>
             <a:endParaRPr/>
           </a:p>
@@ -16334,7 +16362,7 @@
                 <a:cs typeface="Instrument Sans"/>
                 <a:sym typeface="Instrument Sans"/>
               </a:rPr>
-              <a:t>👉 Think: </a:t>
+              <a:t>Reproducible: </a:t>
             </a:r>
             <a:r>
               <a:rPr b="0" i="0" lang="en-US" sz="2000" u="none" cap="none" strike="noStrike">

--- a/docs/deck/breakwater-pitch.pptx
+++ b/docs/deck/breakwater-pitch.pptx
@@ -16302,7 +16302,7 @@
                 <a:cs typeface="Instrument Sans"/>
                 <a:sym typeface="Instrument Sans"/>
               </a:rPr>
-              <a:t>Built during the event: 19 commits on main, 18 merged PRs, 43 tests, CI on every PR.</a:t>
+              <a:t>Built during the event: 21 commits on main, 20 merged PRs, 43 tests, CI on every PR.</a:t>
             </a:r>
             <a:endParaRPr/>
           </a:p>

--- a/docs/deck/breakwater-pitch.pptx
+++ b/docs/deck/breakwater-pitch.pptx
@@ -16302,7 +16302,7 @@
                 <a:cs typeface="Instrument Sans"/>
                 <a:sym typeface="Instrument Sans"/>
               </a:rPr>
-              <a:t>Built during the event: 21 commits on main, 20 merged PRs, 43 tests, CI on every PR.</a:t>
+              <a:t>Built during the event: 22 commits on main, 21 merged PRs, 43 tests, CI on every PR.</a:t>
             </a:r>
             <a:endParaRPr/>
           </a:p>
